--- a/Presentation/Parth_Santosh_Mahadik_E-commerce_Sales_Dashboard.pptx
+++ b/Presentation/Parth_Santosh_Mahadik_E-commerce_Sales_Dashboard.pptx
@@ -3737,8 +3737,8 @@
         </p:nvSpPr>
         <p:spPr>
           <a:xfrm>
-            <a:off x="235880" y="1729190"/>
-            <a:ext cx="11463751" cy="4251960"/>
+            <a:off x="235881" y="1729190"/>
+            <a:ext cx="11565350" cy="4251960"/>
           </a:xfrm>
         </p:spPr>
         <p:txBody>
@@ -3791,17 +3791,20 @@
               <a:rPr lang="en-IN" sz="2200" dirty="0">
                 <a:latin typeface="Franklin Gothic Book"/>
               </a:rPr>
-              <a:t>GitHub Repo Link:</a:t>
-            </a:r>
-            <a:r>
-              <a:rPr lang="en-IN" sz="2200" dirty="0">
-                <a:solidFill>
-                  <a:srgbClr val="0070C0"/>
-                </a:solidFill>
-                <a:latin typeface="Franklin Gothic Book"/>
+              <a:t>GitHub Repo Link: </a:t>
+            </a:r>
+            <a:r>
+              <a:rPr lang="en-US" sz="2400" dirty="0">
+                <a:hlinkClick r:id="rId3"/>
               </a:rPr>
-              <a:t> https://github.com/ParthMahadik04/ecommerce-sales-dashboard.git</a:t>
-            </a:r>
+              <a:t>https://github.com/ParthMahadik04/ecommerce-sales-dashboard.git</a:t>
+            </a:r>
+            <a:endParaRPr lang="en-US" sz="2000" dirty="0"/>
+          </a:p>
+          <a:p>
+            <a:pPr marL="0" indent="0">
+              <a:buNone/>
+            </a:pPr>
             <a:endParaRPr lang="en-IN" sz="2200" u="sng" dirty="0">
               <a:solidFill>
                 <a:srgbClr val="0070C0"/>
@@ -5663,13 +5666,13 @@
         </p:nvSpPr>
         <p:spPr>
           <a:xfrm>
-            <a:off x="338137" y="1584103"/>
-            <a:ext cx="10515600" cy="4251960"/>
+            <a:off x="338136" y="1584103"/>
+            <a:ext cx="11377126" cy="4251960"/>
           </a:xfrm>
         </p:spPr>
         <p:txBody>
           <a:bodyPr vert="horz" lIns="91440" tIns="45720" rIns="91440" bIns="45720" rtlCol="0">
-            <a:normAutofit lnSpcReduction="10000"/>
+            <a:normAutofit/>
           </a:bodyPr>
           <a:lstStyle/>
           <a:p>
